--- a/frontend/dist/PPT_template/SYMBIOT_2026_OPEN_PPT.pptx
+++ b/frontend/dist/PPT_template/SYMBIOT_2026_OPEN_PPT.pptx
@@ -5058,7 +5058,7 @@
         <p:spPr>
           <a:xfrm>
             <a:off x="2133600" y="6819900"/>
-            <a:ext cx="6604123" cy="381643"/>
+            <a:ext cx="6604123" cy="819618"/>
           </a:xfrm>
           <a:prstGeom prst="rect">
             <a:avLst/>
@@ -5085,10 +5085,17 @@
                 <a:cs typeface="Montserrat Classic Bold"/>
                 <a:sym typeface="Montserrat Classic Bold"/>
               </a:rPr>
-              <a:t>TEAM </a:t>
-            </a:r>
-            <a:r>
-              <a:rPr lang="en-US" sz="2583" b="1" spc="129">
+              <a:t>TEAM NAME:</a:t>
+            </a:r>
+          </a:p>
+          <a:p>
+            <a:pPr algn="l">
+              <a:lnSpc>
+                <a:spcPts val="3255"/>
+              </a:lnSpc>
+            </a:pPr>
+            <a:r>
+              <a:rPr lang="en-US" sz="2583" b="1" spc="129" dirty="0">
                 <a:solidFill>
                   <a:srgbClr val="111630"/>
                 </a:solidFill>
@@ -5097,17 +5104,8 @@
                 <a:cs typeface="Montserrat Classic Bold"/>
                 <a:sym typeface="Montserrat Classic Bold"/>
               </a:rPr>
-              <a:t>NAME:</a:t>
-            </a:r>
-            <a:endParaRPr lang="en-US" sz="2583" b="1" spc="129" dirty="0">
-              <a:solidFill>
-                <a:srgbClr val="111630"/>
-              </a:solidFill>
-              <a:latin typeface="Montserrat Classic Bold"/>
-              <a:ea typeface="Montserrat Classic Bold"/>
-              <a:cs typeface="Montserrat Classic Bold"/>
-              <a:sym typeface="Montserrat Classic Bold"/>
-            </a:endParaRPr>
+              <a:t>PSID:</a:t>
+            </a:r>
           </a:p>
         </p:txBody>
       </p:sp>
